--- a/PPT정리/35. MVP 개발 이후 고도화.pptx
+++ b/PPT정리/35. MVP 개발 이후 고도화.pptx
@@ -339,7 +339,7 @@
           <a:p>
             <a:fld id="{82406647-4BF1-4D15-B944-8CAE439195A8}" type="datetimeFigureOut">
               <a:rPr lang="ko-KR" altLang="en-US" smtClean="0"/>
-              <a:t>2026-07-04</a:t>
+              <a:t>2026-09-30</a:t>
             </a:fld>
             <a:endParaRPr lang="ko-KR" altLang="en-US"/>
           </a:p>
@@ -547,7 +547,7 @@
           <a:p>
             <a:fld id="{82406647-4BF1-4D15-B944-8CAE439195A8}" type="datetimeFigureOut">
               <a:rPr lang="ko-KR" altLang="en-US" smtClean="0"/>
-              <a:t>2026-07-04</a:t>
+              <a:t>2026-09-30</a:t>
             </a:fld>
             <a:endParaRPr lang="ko-KR" altLang="en-US"/>
           </a:p>
@@ -803,7 +803,7 @@
           <a:p>
             <a:fld id="{82406647-4BF1-4D15-B944-8CAE439195A8}" type="datetimeFigureOut">
               <a:rPr lang="ko-KR" altLang="en-US" smtClean="0"/>
-              <a:t>2026-07-04</a:t>
+              <a:t>2026-09-30</a:t>
             </a:fld>
             <a:endParaRPr lang="ko-KR" altLang="en-US"/>
           </a:p>
@@ -977,7 +977,7 @@
           <a:p>
             <a:fld id="{82406647-4BF1-4D15-B944-8CAE439195A8}" type="datetimeFigureOut">
               <a:rPr lang="ko-KR" altLang="en-US" smtClean="0"/>
-              <a:t>2026-07-04</a:t>
+              <a:t>2026-09-30</a:t>
             </a:fld>
             <a:endParaRPr lang="ko-KR" altLang="en-US"/>
           </a:p>
@@ -1320,7 +1320,7 @@
           <a:p>
             <a:fld id="{82406647-4BF1-4D15-B944-8CAE439195A8}" type="datetimeFigureOut">
               <a:rPr lang="ko-KR" altLang="en-US" smtClean="0"/>
-              <a:t>2026-07-04</a:t>
+              <a:t>2026-09-30</a:t>
             </a:fld>
             <a:endParaRPr lang="ko-KR" altLang="en-US"/>
           </a:p>
@@ -1595,7 +1595,7 @@
           <a:p>
             <a:fld id="{82406647-4BF1-4D15-B944-8CAE439195A8}" type="datetimeFigureOut">
               <a:rPr lang="ko-KR" altLang="en-US" smtClean="0"/>
-              <a:t>2026-07-04</a:t>
+              <a:t>2026-09-30</a:t>
             </a:fld>
             <a:endParaRPr lang="ko-KR" altLang="en-US"/>
           </a:p>
@@ -1974,7 +1974,7 @@
           <a:p>
             <a:fld id="{82406647-4BF1-4D15-B944-8CAE439195A8}" type="datetimeFigureOut">
               <a:rPr lang="ko-KR" altLang="en-US" smtClean="0"/>
-              <a:t>2026-07-04</a:t>
+              <a:t>2026-09-30</a:t>
             </a:fld>
             <a:endParaRPr lang="ko-KR" altLang="en-US"/>
           </a:p>
@@ -2092,7 +2092,7 @@
           <a:p>
             <a:fld id="{82406647-4BF1-4D15-B944-8CAE439195A8}" type="datetimeFigureOut">
               <a:rPr lang="ko-KR" altLang="en-US" smtClean="0"/>
-              <a:t>2026-07-04</a:t>
+              <a:t>2026-09-30</a:t>
             </a:fld>
             <a:endParaRPr lang="ko-KR" altLang="en-US"/>
           </a:p>
@@ -2263,7 +2263,7 @@
           <a:p>
             <a:fld id="{82406647-4BF1-4D15-B944-8CAE439195A8}" type="datetimeFigureOut">
               <a:rPr lang="ko-KR" altLang="en-US" smtClean="0"/>
-              <a:t>2026-07-04</a:t>
+              <a:t>2026-09-30</a:t>
             </a:fld>
             <a:endParaRPr lang="ko-KR" altLang="en-US"/>
           </a:p>
@@ -2617,7 +2617,7 @@
           <a:p>
             <a:fld id="{82406647-4BF1-4D15-B944-8CAE439195A8}" type="datetimeFigureOut">
               <a:rPr lang="ko-KR" altLang="en-US" smtClean="0"/>
-              <a:t>2026-07-04</a:t>
+              <a:t>2026-09-30</a:t>
             </a:fld>
             <a:endParaRPr lang="ko-KR" altLang="en-US"/>
           </a:p>
@@ -2999,7 +2999,7 @@
           <a:p>
             <a:fld id="{82406647-4BF1-4D15-B944-8CAE439195A8}" type="datetimeFigureOut">
               <a:rPr lang="ko-KR" altLang="en-US" smtClean="0"/>
-              <a:t>2026-07-04</a:t>
+              <a:t>2026-09-30</a:t>
             </a:fld>
             <a:endParaRPr lang="ko-KR" altLang="en-US"/>
           </a:p>
@@ -3286,7 +3286,7 @@
           <a:p>
             <a:fld id="{82406647-4BF1-4D15-B944-8CAE439195A8}" type="datetimeFigureOut">
               <a:rPr lang="ko-KR" altLang="en-US" smtClean="0"/>
-              <a:t>2026-07-04</a:t>
+              <a:t>2026-09-30</a:t>
             </a:fld>
             <a:endParaRPr lang="ko-KR" altLang="en-US"/>
           </a:p>
@@ -4109,7 +4109,7 @@
         </p:blipFill>
         <p:spPr>
           <a:xfrm>
-            <a:off x="3063711" y="2844538"/>
+            <a:off x="3063711" y="2815662"/>
             <a:ext cx="5131985" cy="2573517"/>
           </a:xfrm>
           <a:prstGeom prst="rect">
@@ -4131,7 +4131,7 @@
         </p:nvSpPr>
         <p:spPr>
           <a:xfrm>
-            <a:off x="3063711" y="5542545"/>
+            <a:off x="3063711" y="5465543"/>
             <a:ext cx="8502978" cy="1277273"/>
           </a:xfrm>
           <a:prstGeom prst="rect">
